--- a/qr_fig/fig.pptx
+++ b/qr_fig/fig.pptx
@@ -113,6 +113,11 @@
       </a:defRPr>
     </a:lvl9pPr>
   </p:defaultTextStyle>
+  <p:extLst>
+    <p:ext uri="{EFAFB233-063F-42B5-8137-9DF3F51BA10A}">
+      <p15:sldGuideLst xmlns:p15="http://schemas.microsoft.com/office/powerpoint/2012/main"/>
+    </p:ext>
+  </p:extLst>
 </p:presentation>
 </file>
 
@@ -265,7 +270,7 @@
           <a:p>
             <a:fld id="{0DFA9736-8A4E-8B43-AFF9-471AFB62F90C}" type="datetimeFigureOut">
               <a:rPr lang="en-CN" smtClean="0"/>
-              <a:t>2026/4/29</a:t>
+              <a:t>2026/6/1</a:t>
             </a:fld>
             <a:endParaRPr lang="en-CN"/>
           </a:p>
@@ -465,7 +470,7 @@
           <a:p>
             <a:fld id="{0DFA9736-8A4E-8B43-AFF9-471AFB62F90C}" type="datetimeFigureOut">
               <a:rPr lang="en-CN" smtClean="0"/>
-              <a:t>2026/4/29</a:t>
+              <a:t>2026/6/1</a:t>
             </a:fld>
             <a:endParaRPr lang="en-CN"/>
           </a:p>
@@ -675,7 +680,7 @@
           <a:p>
             <a:fld id="{0DFA9736-8A4E-8B43-AFF9-471AFB62F90C}" type="datetimeFigureOut">
               <a:rPr lang="en-CN" smtClean="0"/>
-              <a:t>2026/4/29</a:t>
+              <a:t>2026/6/1</a:t>
             </a:fld>
             <a:endParaRPr lang="en-CN"/>
           </a:p>
@@ -875,7 +880,7 @@
           <a:p>
             <a:fld id="{0DFA9736-8A4E-8B43-AFF9-471AFB62F90C}" type="datetimeFigureOut">
               <a:rPr lang="en-CN" smtClean="0"/>
-              <a:t>2026/4/29</a:t>
+              <a:t>2026/6/1</a:t>
             </a:fld>
             <a:endParaRPr lang="en-CN"/>
           </a:p>
@@ -1151,7 +1156,7 @@
           <a:p>
             <a:fld id="{0DFA9736-8A4E-8B43-AFF9-471AFB62F90C}" type="datetimeFigureOut">
               <a:rPr lang="en-CN" smtClean="0"/>
-              <a:t>2026/4/29</a:t>
+              <a:t>2026/6/1</a:t>
             </a:fld>
             <a:endParaRPr lang="en-CN"/>
           </a:p>
@@ -1419,7 +1424,7 @@
           <a:p>
             <a:fld id="{0DFA9736-8A4E-8B43-AFF9-471AFB62F90C}" type="datetimeFigureOut">
               <a:rPr lang="en-CN" smtClean="0"/>
-              <a:t>2026/4/29</a:t>
+              <a:t>2026/6/1</a:t>
             </a:fld>
             <a:endParaRPr lang="en-CN"/>
           </a:p>
@@ -1834,7 +1839,7 @@
           <a:p>
             <a:fld id="{0DFA9736-8A4E-8B43-AFF9-471AFB62F90C}" type="datetimeFigureOut">
               <a:rPr lang="en-CN" smtClean="0"/>
-              <a:t>2026/4/29</a:t>
+              <a:t>2026/6/1</a:t>
             </a:fld>
             <a:endParaRPr lang="en-CN"/>
           </a:p>
@@ -1976,7 +1981,7 @@
           <a:p>
             <a:fld id="{0DFA9736-8A4E-8B43-AFF9-471AFB62F90C}" type="datetimeFigureOut">
               <a:rPr lang="en-CN" smtClean="0"/>
-              <a:t>2026/4/29</a:t>
+              <a:t>2026/6/1</a:t>
             </a:fld>
             <a:endParaRPr lang="en-CN"/>
           </a:p>
@@ -2089,7 +2094,7 @@
           <a:p>
             <a:fld id="{0DFA9736-8A4E-8B43-AFF9-471AFB62F90C}" type="datetimeFigureOut">
               <a:rPr lang="en-CN" smtClean="0"/>
-              <a:t>2026/4/29</a:t>
+              <a:t>2026/6/1</a:t>
             </a:fld>
             <a:endParaRPr lang="en-CN"/>
           </a:p>
@@ -2402,7 +2407,7 @@
           <a:p>
             <a:fld id="{0DFA9736-8A4E-8B43-AFF9-471AFB62F90C}" type="datetimeFigureOut">
               <a:rPr lang="en-CN" smtClean="0"/>
-              <a:t>2026/4/29</a:t>
+              <a:t>2026/6/1</a:t>
             </a:fld>
             <a:endParaRPr lang="en-CN"/>
           </a:p>
@@ -2691,7 +2696,7 @@
           <a:p>
             <a:fld id="{0DFA9736-8A4E-8B43-AFF9-471AFB62F90C}" type="datetimeFigureOut">
               <a:rPr lang="en-CN" smtClean="0"/>
-              <a:t>2026/4/29</a:t>
+              <a:t>2026/6/1</a:t>
             </a:fld>
             <a:endParaRPr lang="en-CN"/>
           </a:p>
@@ -2934,7 +2939,7 @@
           <a:p>
             <a:fld id="{0DFA9736-8A4E-8B43-AFF9-471AFB62F90C}" type="datetimeFigureOut">
               <a:rPr lang="en-CN" smtClean="0"/>
-              <a:t>2026/4/29</a:t>
+              <a:t>2026/6/1</a:t>
             </a:fld>
             <a:endParaRPr lang="en-CN"/>
           </a:p>
@@ -3372,8 +3377,8 @@
           </a:stretch>
         </p:blipFill>
         <p:spPr>
-          <a:xfrm>
-            <a:off x="4826000" y="2159000"/>
+          <a:xfrm rot="20178436">
+            <a:off x="2744952" y="1728075"/>
             <a:ext cx="2540000" cy="2540000"/>
           </a:xfrm>
           <a:prstGeom prst="rect">
@@ -3387,6 +3392,66 @@
             <a:extLst>
               <a:ext uri="{FF2B5EF4-FFF2-40B4-BE49-F238E27FC236}">
                 <a16:creationId xmlns:a16="http://schemas.microsoft.com/office/drawing/2014/main" id="{636A51C8-C789-910D-206C-17D477C78ECC}"/>
+              </a:ext>
+            </a:extLst>
+          </p:cNvPr>
+          <p:cNvPicPr>
+            <a:picLocks noChangeAspect="1"/>
+          </p:cNvPicPr>
+          <p:nvPr/>
+        </p:nvPicPr>
+        <p:blipFill>
+          <a:blip r:embed="rId3"/>
+          <a:stretch>
+            <a:fillRect/>
+          </a:stretch>
+        </p:blipFill>
+        <p:spPr>
+          <a:xfrm rot="14782180">
+            <a:off x="1949659" y="3310518"/>
+            <a:ext cx="2258492" cy="264595"/>
+          </a:xfrm>
+          <a:prstGeom prst="rect">
+            <a:avLst/>
+          </a:prstGeom>
+        </p:spPr>
+      </p:pic>
+      <p:pic>
+        <p:nvPicPr>
+          <p:cNvPr id="2" name="Picture 1">
+            <a:extLst>
+              <a:ext uri="{FF2B5EF4-FFF2-40B4-BE49-F238E27FC236}">
+                <a16:creationId xmlns:a16="http://schemas.microsoft.com/office/drawing/2014/main" id="{883087F7-609B-52DA-FD73-57DB295DC45C}"/>
+              </a:ext>
+            </a:extLst>
+          </p:cNvPr>
+          <p:cNvPicPr>
+            <a:picLocks noChangeAspect="1"/>
+          </p:cNvPicPr>
+          <p:nvPr/>
+        </p:nvPicPr>
+        <p:blipFill>
+          <a:blip r:embed="rId2"/>
+          <a:stretch>
+            <a:fillRect/>
+          </a:stretch>
+        </p:blipFill>
+        <p:spPr>
+          <a:xfrm>
+            <a:off x="8026402" y="1085228"/>
+            <a:ext cx="2540000" cy="2540000"/>
+          </a:xfrm>
+          <a:prstGeom prst="rect">
+            <a:avLst/>
+          </a:prstGeom>
+        </p:spPr>
+      </p:pic>
+      <p:pic>
+        <p:nvPicPr>
+          <p:cNvPr id="3" name="Picture 2">
+            <a:extLst>
+              <a:ext uri="{FF2B5EF4-FFF2-40B4-BE49-F238E27FC236}">
+                <a16:creationId xmlns:a16="http://schemas.microsoft.com/office/drawing/2014/main" id="{BB859872-A46B-559B-D36B-3BA2E7713282}"/>
               </a:ext>
             </a:extLst>
           </p:cNvPr>
@@ -3403,7 +3468,7 @@
         </p:blipFill>
         <p:spPr>
           <a:xfrm rot="16200000">
-            <a:off x="4852285" y="2257089"/>
+            <a:off x="8107431" y="1140427"/>
             <a:ext cx="1001971" cy="805792"/>
           </a:xfrm>
           <a:prstGeom prst="rect">
@@ -3413,10 +3478,10 @@
       </p:pic>
       <p:pic>
         <p:nvPicPr>
-          <p:cNvPr id="11" name="Picture 10">
-            <a:extLst>
-              <a:ext uri="{FF2B5EF4-FFF2-40B4-BE49-F238E27FC236}">
-                <a16:creationId xmlns:a16="http://schemas.microsoft.com/office/drawing/2014/main" id="{25ED9494-5F70-7D24-CEDD-A484236A43EB}"/>
+          <p:cNvPr id="4" name="Picture 3">
+            <a:extLst>
+              <a:ext uri="{FF2B5EF4-FFF2-40B4-BE49-F238E27FC236}">
+                <a16:creationId xmlns:a16="http://schemas.microsoft.com/office/drawing/2014/main" id="{983D64AA-4AA1-3A9E-F23C-5760F0408261}"/>
               </a:ext>
             </a:extLst>
           </p:cNvPr>
@@ -3433,7 +3498,7 @@
         </p:blipFill>
         <p:spPr>
           <a:xfrm rot="16200000">
-            <a:off x="6337746" y="2257088"/>
+            <a:off x="9459133" y="1183317"/>
             <a:ext cx="1001971" cy="805792"/>
           </a:xfrm>
           <a:prstGeom prst="rect">
